--- a/Final deliverables/TakeMeHome_Deck v1.pptx
+++ b/Final deliverables/TakeMeHome_Deck v1.pptx
@@ -3455,9 +3455,6 @@
             </a:pPr>
             <a:r>
               <a:rPr lang="en-US" sz="1100" dirty="0">
-                <a:solidFill>
-                  <a:srgbClr val="2D2D2D"/>
-                </a:solidFill>
                 <a:latin typeface="Calibri" pitchFamily="34" charset="0"/>
                 <a:ea typeface="Calibri" pitchFamily="34" charset="-122"/>
                 <a:cs typeface="Calibri" pitchFamily="34" charset="-120"/>
@@ -3498,14 +3495,11 @@
             </a:pPr>
             <a:r>
               <a:rPr lang="en-US" sz="1100" dirty="0">
-                <a:solidFill>
-                  <a:srgbClr val="2D2D2D"/>
-                </a:solidFill>
                 <a:latin typeface="Calibri" pitchFamily="34" charset="0"/>
                 <a:ea typeface="Calibri" pitchFamily="34" charset="-122"/>
                 <a:cs typeface="Calibri" pitchFamily="34" charset="-120"/>
               </a:rPr>
-              <a:t>Log R² = 0.361 — behavior at adoption event is unobservable at intake</a:t>
+              <a:t>Log-scale R² = 0.361 — behavior at adoption event is unobservable at intake</a:t>
             </a:r>
             <a:endParaRPr lang="en-US" sz="1100" dirty="0"/>
           </a:p>
@@ -3541,9 +3535,6 @@
             </a:pPr>
             <a:r>
               <a:rPr lang="en-US" sz="1100" dirty="0">
-                <a:solidFill>
-                  <a:srgbClr val="2D2D2D"/>
-                </a:solidFill>
                 <a:latin typeface="Calibri" pitchFamily="34" charset="0"/>
                 <a:ea typeface="Calibri" pitchFamily="34" charset="-122"/>
                 <a:cs typeface="Calibri" pitchFamily="34" charset="-120"/>
@@ -3584,14 +3575,11 @@
             </a:pPr>
             <a:r>
               <a:rPr lang="en-US" sz="1100" dirty="0">
-                <a:solidFill>
-                  <a:srgbClr val="2D2D2D"/>
-                </a:solidFill>
                 <a:latin typeface="Calibri" pitchFamily="34" charset="0"/>
                 <a:ea typeface="Calibri" pitchFamily="34" charset="-122"/>
                 <a:cs typeface="Calibri" pitchFamily="34" charset="-120"/>
               </a:rPr>
-              <a:t>Naming correlation may reflect reverse causation (staff intuition, not causality)</a:t>
+              <a:t>Naming correlation may reflect reverse causation (staff name those dogs that are likely to be adopted quickly, not causality)</a:t>
             </a:r>
             <a:endParaRPr lang="en-US" sz="1100" dirty="0"/>
           </a:p>
@@ -3737,9 +3725,6 @@
             </a:pPr>
             <a:r>
               <a:rPr lang="en-US" sz="1100" dirty="0">
-                <a:solidFill>
-                  <a:srgbClr val="2D2D2D"/>
-                </a:solidFill>
                 <a:latin typeface="Calibri" pitchFamily="34" charset="0"/>
                 <a:ea typeface="Calibri" pitchFamily="34" charset="-122"/>
                 <a:cs typeface="Calibri" pitchFamily="34" charset="-120"/>
@@ -3758,8 +3743,8 @@
         </p:nvSpPr>
         <p:spPr>
           <a:xfrm>
-            <a:off x="4846320" y="2404872"/>
-            <a:ext cx="3749040" cy="566928"/>
+            <a:off x="4846319" y="2404872"/>
+            <a:ext cx="3837093" cy="566928"/>
           </a:xfrm>
           <a:prstGeom prst="rect">
             <a:avLst/>
@@ -3780,14 +3765,11 @@
             </a:pPr>
             <a:r>
               <a:rPr lang="en-US" sz="1100" dirty="0">
-                <a:solidFill>
-                  <a:srgbClr val="2D2D2D"/>
-                </a:solidFill>
                 <a:latin typeface="Calibri" pitchFamily="34" charset="0"/>
                 <a:ea typeface="Calibri" pitchFamily="34" charset="-122"/>
                 <a:cs typeface="Calibri" pitchFamily="34" charset="-120"/>
               </a:rPr>
-              <a:t>Multi-shelter generalization: test across diverse geographies and policies</a:t>
+              <a:t>Multi-shelter generalization: test across diverse geographical locations and policies</a:t>
             </a:r>
             <a:endParaRPr lang="en-US" sz="1100" dirty="0"/>
           </a:p>
@@ -3823,9 +3805,6 @@
             </a:pPr>
             <a:r>
               <a:rPr lang="en-US" sz="1100" dirty="0">
-                <a:solidFill>
-                  <a:srgbClr val="2D2D2D"/>
-                </a:solidFill>
                 <a:latin typeface="Calibri" pitchFamily="34" charset="0"/>
                 <a:ea typeface="Calibri" pitchFamily="34" charset="-122"/>
                 <a:cs typeface="Calibri" pitchFamily="34" charset="-120"/>
@@ -3866,9 +3845,6 @@
             </a:pPr>
             <a:r>
               <a:rPr lang="en-US" sz="1100" dirty="0">
-                <a:solidFill>
-                  <a:srgbClr val="2D2D2D"/>
-                </a:solidFill>
                 <a:latin typeface="Calibri" pitchFamily="34" charset="0"/>
                 <a:ea typeface="Calibri" pitchFamily="34" charset="-122"/>
                 <a:cs typeface="Calibri" pitchFamily="34" charset="-120"/>
@@ -4084,7 +4060,7 @@
         </p:nvSpPr>
         <p:spPr>
           <a:xfrm>
-            <a:off x="6949440" y="-457200"/>
+            <a:off x="7086600" y="-576072"/>
             <a:ext cx="3200400" cy="3200400"/>
           </a:xfrm>
           <a:prstGeom prst="ellipse">
@@ -4118,7 +4094,7 @@
         </p:nvSpPr>
         <p:spPr>
           <a:xfrm>
-            <a:off x="-731520" y="3200400"/>
+            <a:off x="-1170432" y="3364992"/>
             <a:ext cx="2560320" cy="2560320"/>
           </a:xfrm>
           <a:prstGeom prst="ellipse">
@@ -4536,7 +4512,7 @@
                 <a:ea typeface="Calibri" pitchFamily="34" charset="-122"/>
                 <a:cs typeface="Calibri" pitchFamily="34" charset="-120"/>
               </a:rPr>
-              <a:t>Naming unnamed animals at intake is a zero-cost, immediately actionable intervention</a:t>
+              <a:t>Naming unnamed animals at intake is a zero-cost, immediately actionable intervention to accelerate adoption</a:t>
             </a:r>
             <a:endParaRPr lang="en-US" sz="1200" dirty="0"/>
           </a:p>
@@ -4881,6 +4857,42 @@
           </a:p>
         </p:txBody>
       </p:sp>
+      <p:pic>
+        <p:nvPicPr>
+          <p:cNvPr id="24" name="Graphic 2" descr="Puppy with solid fill">
+            <a:extLst>
+              <a:ext uri="{FF2B5EF4-FFF2-40B4-BE49-F238E27FC236}">
+                <a16:creationId xmlns:a16="http://schemas.microsoft.com/office/drawing/2014/main" id="{F539D061-6F3F-0FC1-5290-503A0394319D}"/>
+              </a:ext>
+            </a:extLst>
+          </p:cNvPr>
+          <p:cNvPicPr>
+            <a:picLocks noChangeAspect="1"/>
+          </p:cNvPicPr>
+          <p:nvPr/>
+        </p:nvPicPr>
+        <p:blipFill>
+          <a:blip r:embed="rId4">
+            <a:extLst>
+              <a:ext uri="{96DAC541-7B7A-43D3-8B79-37D633B846F1}">
+                <asvg:svgBlip xmlns:asvg="http://schemas.microsoft.com/office/drawing/2016/SVG/main" r:embed="rId5"/>
+              </a:ext>
+            </a:extLst>
+          </a:blip>
+          <a:stretch>
+            <a:fillRect/>
+          </a:stretch>
+        </p:blipFill>
+        <p:spPr>
+          <a:xfrm>
+            <a:off x="7644199" y="394763"/>
+            <a:ext cx="1317105" cy="1317105"/>
+          </a:xfrm>
+          <a:prstGeom prst="rect">
+            <a:avLst/>
+          </a:prstGeom>
+        </p:spPr>
+      </p:pic>
     </p:spTree>
   </p:cSld>
   <p:clrMapOvr>
@@ -9230,7 +9242,7 @@
                 <a:ea typeface="Calibri" pitchFamily="34" charset="-122"/>
                 <a:cs typeface="Calibri" pitchFamily="34" charset="-120"/>
               </a:rPr>
-              <a:t>Mean Absolute</a:t>
+              <a:t>Dog Mean Absolute</a:t>
             </a:r>
             <a:endParaRPr lang="en-US" sz="1200" dirty="0"/>
           </a:p>
@@ -9928,7 +9940,7 @@
                 <a:ea typeface="Calibri" pitchFamily="34" charset="-122"/>
                 <a:cs typeface="Calibri" pitchFamily="34" charset="-120"/>
               </a:rPr>
-              <a:t>Mean Absolute</a:t>
+              <a:t>Cat Mean Absolute</a:t>
             </a:r>
             <a:endParaRPr lang="en-US" sz="1200" dirty="0"/>
           </a:p>
@@ -10829,9 +10841,6 @@
             </a:pPr>
             <a:r>
               <a:rPr lang="en-US" sz="900" i="1" dirty="0">
-                <a:solidFill>
-                  <a:srgbClr val="777777"/>
-                </a:solidFill>
                 <a:latin typeface="Calibri" pitchFamily="34" charset="0"/>
                 <a:ea typeface="Calibri" pitchFamily="34" charset="-122"/>
                 <a:cs typeface="Calibri" pitchFamily="34" charset="-120"/>
@@ -10981,9 +10990,6 @@
             </a:pPr>
             <a:r>
               <a:rPr lang="en-US" sz="1000" dirty="0">
-                <a:solidFill>
-                  <a:srgbClr val="2D2D2D"/>
-                </a:solidFill>
                 <a:latin typeface="Calibri" pitchFamily="34" charset="0"/>
                 <a:ea typeface="Calibri" pitchFamily="34" charset="-122"/>
                 <a:cs typeface="Calibri" pitchFamily="34" charset="-120"/>
@@ -11133,9 +11139,6 @@
             </a:pPr>
             <a:r>
               <a:rPr lang="en-US" sz="1000" dirty="0">
-                <a:solidFill>
-                  <a:srgbClr val="2D2D2D"/>
-                </a:solidFill>
                 <a:latin typeface="Calibri" pitchFamily="34" charset="0"/>
                 <a:ea typeface="Calibri" pitchFamily="34" charset="-122"/>
                 <a:cs typeface="Calibri" pitchFamily="34" charset="-120"/>
@@ -11285,14 +11288,11 @@
             </a:pPr>
             <a:r>
               <a:rPr lang="en-US" sz="1000" dirty="0">
-                <a:solidFill>
-                  <a:srgbClr val="2D2D2D"/>
-                </a:solidFill>
                 <a:latin typeface="Calibri" pitchFamily="34" charset="0"/>
                 <a:ea typeface="Calibri" pitchFamily="34" charset="-122"/>
                 <a:cs typeface="Calibri" pitchFamily="34" charset="-120"/>
               </a:rPr>
-              <a:t>Named dogs get adopted faster — a simple, zero-cost intervention</a:t>
+              <a:t>“Named” dogs get adopted faster — a simple, zero-cost intervention</a:t>
             </a:r>
             <a:endParaRPr lang="en-US" sz="1000" dirty="0"/>
           </a:p>
@@ -11437,9 +11437,6 @@
             </a:pPr>
             <a:r>
               <a:rPr lang="en-US" sz="1000" dirty="0">
-                <a:solidFill>
-                  <a:srgbClr val="2D2D2D"/>
-                </a:solidFill>
                 <a:latin typeface="Calibri" pitchFamily="34" charset="0"/>
                 <a:ea typeface="Calibri" pitchFamily="34" charset="-122"/>
                 <a:cs typeface="Calibri" pitchFamily="34" charset="-120"/>
@@ -11680,6 +11677,75 @@
           </a:prstGeom>
         </p:spPr>
       </p:pic>
+      <p:sp>
+        <p:nvSpPr>
+          <p:cNvPr id="31" name="Text 6">
+            <a:extLst>
+              <a:ext uri="{FF2B5EF4-FFF2-40B4-BE49-F238E27FC236}">
+                <a16:creationId xmlns:a16="http://schemas.microsoft.com/office/drawing/2014/main" id="{27E55E80-A6B8-C55A-EE29-10CAD86C1C14}"/>
+              </a:ext>
+            </a:extLst>
+          </p:cNvPr>
+          <p:cNvSpPr/>
+          <p:nvPr/>
+        </p:nvSpPr>
+        <p:spPr>
+          <a:xfrm>
+            <a:off x="475488" y="4588425"/>
+            <a:ext cx="4846320" cy="228600"/>
+          </a:xfrm>
+          <a:prstGeom prst="rect">
+            <a:avLst/>
+          </a:prstGeom>
+          <a:noFill/>
+          <a:ln/>
+        </p:spPr>
+        <p:txBody>
+          <a:bodyPr wrap="square" lIns="0" tIns="0" rIns="0" bIns="0" rtlCol="0" anchor="ctr"/>
+          <a:lstStyle/>
+          <a:p>
+            <a:pPr marL="0" indent="0" algn="ctr">
+              <a:buNone/>
+            </a:pPr>
+            <a:r>
+              <a:rPr lang="en-US" sz="900" i="1" dirty="0">
+                <a:solidFill>
+                  <a:schemeClr val="tx1">
+                    <a:lumMod val="50000"/>
+                    <a:lumOff val="50000"/>
+                  </a:schemeClr>
+                </a:solidFill>
+                <a:latin typeface="Calibri" pitchFamily="34" charset="0"/>
+                <a:ea typeface="Calibri" pitchFamily="34" charset="-122"/>
+                <a:cs typeface="Calibri" pitchFamily="34" charset="-120"/>
+              </a:rPr>
+              <a:t>** SHAP: Shapley Additive </a:t>
+            </a:r>
+            <a:r>
+              <a:rPr lang="en-US" sz="900" i="1" dirty="0" err="1">
+                <a:solidFill>
+                  <a:schemeClr val="tx1">
+                    <a:lumMod val="50000"/>
+                    <a:lumOff val="50000"/>
+                  </a:schemeClr>
+                </a:solidFill>
+                <a:latin typeface="Calibri" pitchFamily="34" charset="0"/>
+                <a:ea typeface="Calibri" pitchFamily="34" charset="-122"/>
+                <a:cs typeface="Calibri" pitchFamily="34" charset="-120"/>
+              </a:rPr>
+              <a:t>exPlanations</a:t>
+            </a:r>
+            <a:endParaRPr lang="en-US" sz="900" dirty="0">
+              <a:solidFill>
+                <a:schemeClr val="tx1">
+                  <a:lumMod val="50000"/>
+                  <a:lumOff val="50000"/>
+                </a:schemeClr>
+              </a:solidFill>
+            </a:endParaRPr>
+          </a:p>
+        </p:txBody>
+      </p:sp>
     </p:spTree>
   </p:cSld>
   <p:clrMapOvr>
@@ -12870,7 +12936,7 @@
         </p:nvSpPr>
         <p:spPr>
           <a:xfrm>
-            <a:off x="219456" y="1874520"/>
+            <a:off x="293959" y="2037072"/>
             <a:ext cx="1572768" cy="2578608"/>
           </a:xfrm>
           <a:prstGeom prst="rect">
@@ -12909,7 +12975,7 @@
         </p:nvSpPr>
         <p:spPr>
           <a:xfrm>
-            <a:off x="219456" y="1874520"/>
+            <a:off x="293959" y="2037072"/>
             <a:ext cx="1572768" cy="502920"/>
           </a:xfrm>
           <a:prstGeom prst="rect">
@@ -12941,7 +13007,7 @@
         </p:nvSpPr>
         <p:spPr>
           <a:xfrm>
-            <a:off x="219456" y="1874520"/>
+            <a:off x="293959" y="2037072"/>
             <a:ext cx="1572768" cy="502920"/>
           </a:xfrm>
           <a:prstGeom prst="rect">
@@ -12980,7 +13046,7 @@
         </p:nvSpPr>
         <p:spPr>
           <a:xfrm>
-            <a:off x="265176" y="2487168"/>
+            <a:off x="339679" y="2649720"/>
             <a:ext cx="1481328" cy="457200"/>
           </a:xfrm>
           <a:prstGeom prst="rect">
@@ -13019,7 +13085,7 @@
         </p:nvSpPr>
         <p:spPr>
           <a:xfrm>
-            <a:off x="265176" y="2935224"/>
+            <a:off x="339679" y="3097776"/>
             <a:ext cx="1481328" cy="256032"/>
           </a:xfrm>
           <a:prstGeom prst="rect">
@@ -13058,7 +13124,7 @@
         </p:nvSpPr>
         <p:spPr>
           <a:xfrm>
-            <a:off x="548640" y="3246120"/>
+            <a:off x="623143" y="3408672"/>
             <a:ext cx="914400" cy="36576"/>
           </a:xfrm>
           <a:prstGeom prst="rect">
@@ -13090,7 +13156,7 @@
         </p:nvSpPr>
         <p:spPr>
           <a:xfrm>
-            <a:off x="265176" y="3355848"/>
+            <a:off x="339679" y="3518400"/>
             <a:ext cx="1481328" cy="301752"/>
           </a:xfrm>
           <a:prstGeom prst="rect">
@@ -13129,7 +13195,7 @@
         </p:nvSpPr>
         <p:spPr>
           <a:xfrm>
-            <a:off x="265176" y="3703320"/>
+            <a:off x="339679" y="3865872"/>
             <a:ext cx="1481328" cy="822960"/>
           </a:xfrm>
           <a:prstGeom prst="rect">
@@ -13150,9 +13216,6 @@
             </a:pPr>
             <a:r>
               <a:rPr lang="en-US" sz="950" dirty="0">
-                <a:solidFill>
-                  <a:srgbClr val="2D2D2D"/>
-                </a:solidFill>
                 <a:latin typeface="Calibri" pitchFamily="34" charset="0"/>
                 <a:ea typeface="Calibri" pitchFamily="34" charset="-122"/>
                 <a:cs typeface="Calibri" pitchFamily="34" charset="-120"/>
@@ -13170,9 +13233,6 @@
             </a:pPr>
             <a:r>
               <a:rPr lang="en-US" sz="950" dirty="0">
-                <a:solidFill>
-                  <a:srgbClr val="2D2D2D"/>
-                </a:solidFill>
                 <a:latin typeface="Calibri" pitchFamily="34" charset="0"/>
                 <a:ea typeface="Calibri" pitchFamily="34" charset="-122"/>
                 <a:cs typeface="Calibri" pitchFamily="34" charset="-120"/>
@@ -13191,7 +13251,7 @@
         </p:nvSpPr>
         <p:spPr>
           <a:xfrm>
-            <a:off x="1938528" y="1874520"/>
+            <a:off x="2013031" y="2037072"/>
             <a:ext cx="1572768" cy="2578608"/>
           </a:xfrm>
           <a:prstGeom prst="rect">
@@ -13230,7 +13290,7 @@
         </p:nvSpPr>
         <p:spPr>
           <a:xfrm>
-            <a:off x="1938528" y="1874520"/>
+            <a:off x="2013031" y="2037072"/>
             <a:ext cx="1572768" cy="502920"/>
           </a:xfrm>
           <a:prstGeom prst="rect">
@@ -13262,7 +13322,7 @@
         </p:nvSpPr>
         <p:spPr>
           <a:xfrm>
-            <a:off x="1938528" y="1874520"/>
+            <a:off x="2013031" y="2037072"/>
             <a:ext cx="1572768" cy="502920"/>
           </a:xfrm>
           <a:prstGeom prst="rect">
@@ -13301,7 +13361,7 @@
         </p:nvSpPr>
         <p:spPr>
           <a:xfrm>
-            <a:off x="1984248" y="2487168"/>
+            <a:off x="2058751" y="2649720"/>
             <a:ext cx="1481328" cy="457200"/>
           </a:xfrm>
           <a:prstGeom prst="rect">
@@ -13340,7 +13400,7 @@
         </p:nvSpPr>
         <p:spPr>
           <a:xfrm>
-            <a:off x="1984248" y="2935224"/>
+            <a:off x="2058751" y="3097776"/>
             <a:ext cx="1481328" cy="256032"/>
           </a:xfrm>
           <a:prstGeom prst="rect">
@@ -13379,7 +13439,7 @@
         </p:nvSpPr>
         <p:spPr>
           <a:xfrm>
-            <a:off x="2267712" y="3246120"/>
+            <a:off x="2342215" y="3408672"/>
             <a:ext cx="914400" cy="36576"/>
           </a:xfrm>
           <a:prstGeom prst="rect">
@@ -13411,7 +13471,7 @@
         </p:nvSpPr>
         <p:spPr>
           <a:xfrm>
-            <a:off x="1984248" y="3355848"/>
+            <a:off x="2058751" y="3518400"/>
             <a:ext cx="1481328" cy="301752"/>
           </a:xfrm>
           <a:prstGeom prst="rect">
@@ -13450,7 +13510,7 @@
         </p:nvSpPr>
         <p:spPr>
           <a:xfrm>
-            <a:off x="1984248" y="3703320"/>
+            <a:off x="2058751" y="3865872"/>
             <a:ext cx="1481328" cy="822960"/>
           </a:xfrm>
           <a:prstGeom prst="rect">
@@ -13471,9 +13531,6 @@
             </a:pPr>
             <a:r>
               <a:rPr lang="en-US" sz="950" dirty="0">
-                <a:solidFill>
-                  <a:srgbClr val="2D2D2D"/>
-                </a:solidFill>
                 <a:latin typeface="Calibri" pitchFamily="34" charset="0"/>
                 <a:ea typeface="Calibri" pitchFamily="34" charset="-122"/>
                 <a:cs typeface="Calibri" pitchFamily="34" charset="-120"/>
@@ -13491,9 +13548,6 @@
             </a:pPr>
             <a:r>
               <a:rPr lang="en-US" sz="950" dirty="0">
-                <a:solidFill>
-                  <a:srgbClr val="2D2D2D"/>
-                </a:solidFill>
                 <a:latin typeface="Calibri" pitchFamily="34" charset="0"/>
                 <a:ea typeface="Calibri" pitchFamily="34" charset="-122"/>
                 <a:cs typeface="Calibri" pitchFamily="34" charset="-120"/>
@@ -13512,7 +13566,7 @@
         </p:nvSpPr>
         <p:spPr>
           <a:xfrm>
-            <a:off x="3657600" y="1874520"/>
+            <a:off x="3732103" y="2037072"/>
             <a:ext cx="1572768" cy="2578608"/>
           </a:xfrm>
           <a:prstGeom prst="rect">
@@ -13551,7 +13605,7 @@
         </p:nvSpPr>
         <p:spPr>
           <a:xfrm>
-            <a:off x="3657600" y="1874520"/>
+            <a:off x="3732103" y="2037072"/>
             <a:ext cx="1572768" cy="502920"/>
           </a:xfrm>
           <a:prstGeom prst="rect">
@@ -13583,7 +13637,7 @@
         </p:nvSpPr>
         <p:spPr>
           <a:xfrm>
-            <a:off x="3657600" y="1874520"/>
+            <a:off x="3732103" y="2037072"/>
             <a:ext cx="1572768" cy="502920"/>
           </a:xfrm>
           <a:prstGeom prst="rect">
@@ -13622,7 +13676,7 @@
         </p:nvSpPr>
         <p:spPr>
           <a:xfrm>
-            <a:off x="3703320" y="2487168"/>
+            <a:off x="3777823" y="2649720"/>
             <a:ext cx="1481328" cy="457200"/>
           </a:xfrm>
           <a:prstGeom prst="rect">
@@ -13661,7 +13715,7 @@
         </p:nvSpPr>
         <p:spPr>
           <a:xfrm>
-            <a:off x="3703320" y="2935224"/>
+            <a:off x="3777823" y="3097776"/>
             <a:ext cx="1481328" cy="256032"/>
           </a:xfrm>
           <a:prstGeom prst="rect">
@@ -13700,7 +13754,7 @@
         </p:nvSpPr>
         <p:spPr>
           <a:xfrm>
-            <a:off x="3986784" y="3246120"/>
+            <a:off x="4061287" y="3408672"/>
             <a:ext cx="914400" cy="36576"/>
           </a:xfrm>
           <a:prstGeom prst="rect">
@@ -13732,7 +13786,7 @@
         </p:nvSpPr>
         <p:spPr>
           <a:xfrm>
-            <a:off x="3703320" y="3355848"/>
+            <a:off x="3777823" y="3518400"/>
             <a:ext cx="1481328" cy="301752"/>
           </a:xfrm>
           <a:prstGeom prst="rect">
@@ -13771,7 +13825,7 @@
         </p:nvSpPr>
         <p:spPr>
           <a:xfrm>
-            <a:off x="3703320" y="3703320"/>
+            <a:off x="3777823" y="3865872"/>
             <a:ext cx="1481328" cy="822960"/>
           </a:xfrm>
           <a:prstGeom prst="rect">
@@ -13792,9 +13846,6 @@
             </a:pPr>
             <a:r>
               <a:rPr lang="en-US" sz="950" dirty="0">
-                <a:solidFill>
-                  <a:srgbClr val="2D2D2D"/>
-                </a:solidFill>
                 <a:latin typeface="Calibri" pitchFamily="34" charset="0"/>
                 <a:ea typeface="Calibri" pitchFamily="34" charset="-122"/>
                 <a:cs typeface="Calibri" pitchFamily="34" charset="-120"/>
@@ -13812,9 +13863,6 @@
             </a:pPr>
             <a:r>
               <a:rPr lang="en-US" sz="950" dirty="0">
-                <a:solidFill>
-                  <a:srgbClr val="2D2D2D"/>
-                </a:solidFill>
                 <a:latin typeface="Calibri" pitchFamily="34" charset="0"/>
                 <a:ea typeface="Calibri" pitchFamily="34" charset="-122"/>
                 <a:cs typeface="Calibri" pitchFamily="34" charset="-120"/>
@@ -13833,7 +13881,7 @@
         </p:nvSpPr>
         <p:spPr>
           <a:xfrm>
-            <a:off x="5376672" y="1874520"/>
+            <a:off x="5451175" y="2037072"/>
             <a:ext cx="1572768" cy="2578608"/>
           </a:xfrm>
           <a:prstGeom prst="rect">
@@ -13872,7 +13920,7 @@
         </p:nvSpPr>
         <p:spPr>
           <a:xfrm>
-            <a:off x="5376672" y="1874520"/>
+            <a:off x="5451175" y="2037072"/>
             <a:ext cx="1572768" cy="502920"/>
           </a:xfrm>
           <a:prstGeom prst="rect">
@@ -13904,7 +13952,7 @@
         </p:nvSpPr>
         <p:spPr>
           <a:xfrm>
-            <a:off x="5376672" y="1874520"/>
+            <a:off x="5451175" y="2037072"/>
             <a:ext cx="1572768" cy="502920"/>
           </a:xfrm>
           <a:prstGeom prst="rect">
@@ -13943,7 +13991,7 @@
         </p:nvSpPr>
         <p:spPr>
           <a:xfrm>
-            <a:off x="5422392" y="2487168"/>
+            <a:off x="5496895" y="2649720"/>
             <a:ext cx="1481328" cy="457200"/>
           </a:xfrm>
           <a:prstGeom prst="rect">
@@ -13982,7 +14030,7 @@
         </p:nvSpPr>
         <p:spPr>
           <a:xfrm>
-            <a:off x="5422392" y="2935224"/>
+            <a:off x="5496895" y="3097776"/>
             <a:ext cx="1481328" cy="256032"/>
           </a:xfrm>
           <a:prstGeom prst="rect">
@@ -14021,7 +14069,7 @@
         </p:nvSpPr>
         <p:spPr>
           <a:xfrm>
-            <a:off x="5705856" y="3246120"/>
+            <a:off x="5780359" y="3408672"/>
             <a:ext cx="914400" cy="36576"/>
           </a:xfrm>
           <a:prstGeom prst="rect">
@@ -14053,7 +14101,7 @@
         </p:nvSpPr>
         <p:spPr>
           <a:xfrm>
-            <a:off x="5422392" y="3355848"/>
+            <a:off x="5496895" y="3518400"/>
             <a:ext cx="1481328" cy="301752"/>
           </a:xfrm>
           <a:prstGeom prst="rect">
@@ -14092,7 +14140,7 @@
         </p:nvSpPr>
         <p:spPr>
           <a:xfrm>
-            <a:off x="5422392" y="3703320"/>
+            <a:off x="5496895" y="3865872"/>
             <a:ext cx="1481328" cy="822960"/>
           </a:xfrm>
           <a:prstGeom prst="rect">
@@ -14113,9 +14161,6 @@
             </a:pPr>
             <a:r>
               <a:rPr lang="en-US" sz="950" dirty="0">
-                <a:solidFill>
-                  <a:srgbClr val="2D2D2D"/>
-                </a:solidFill>
                 <a:latin typeface="Calibri" pitchFamily="34" charset="0"/>
                 <a:ea typeface="Calibri" pitchFamily="34" charset="-122"/>
                 <a:cs typeface="Calibri" pitchFamily="34" charset="-120"/>
@@ -14133,9 +14178,6 @@
             </a:pPr>
             <a:r>
               <a:rPr lang="en-US" sz="950" dirty="0">
-                <a:solidFill>
-                  <a:srgbClr val="2D2D2D"/>
-                </a:solidFill>
                 <a:latin typeface="Calibri" pitchFamily="34" charset="0"/>
                 <a:ea typeface="Calibri" pitchFamily="34" charset="-122"/>
                 <a:cs typeface="Calibri" pitchFamily="34" charset="-120"/>
@@ -14154,7 +14196,7 @@
         </p:nvSpPr>
         <p:spPr>
           <a:xfrm>
-            <a:off x="7095744" y="1874520"/>
+            <a:off x="7170247" y="2037072"/>
             <a:ext cx="1572768" cy="2578608"/>
           </a:xfrm>
           <a:prstGeom prst="rect">
@@ -14193,7 +14235,7 @@
         </p:nvSpPr>
         <p:spPr>
           <a:xfrm>
-            <a:off x="7095744" y="1874520"/>
+            <a:off x="7170247" y="2037072"/>
             <a:ext cx="1572768" cy="502920"/>
           </a:xfrm>
           <a:prstGeom prst="rect">
@@ -14225,7 +14267,7 @@
         </p:nvSpPr>
         <p:spPr>
           <a:xfrm>
-            <a:off x="7095744" y="1874520"/>
+            <a:off x="7170247" y="2037072"/>
             <a:ext cx="1572768" cy="502920"/>
           </a:xfrm>
           <a:prstGeom prst="rect">
@@ -14264,7 +14306,7 @@
         </p:nvSpPr>
         <p:spPr>
           <a:xfrm>
-            <a:off x="7141464" y="2487168"/>
+            <a:off x="7215967" y="2649720"/>
             <a:ext cx="1481328" cy="457200"/>
           </a:xfrm>
           <a:prstGeom prst="rect">
@@ -14303,7 +14345,7 @@
         </p:nvSpPr>
         <p:spPr>
           <a:xfrm>
-            <a:off x="7141464" y="2935224"/>
+            <a:off x="7215967" y="3097776"/>
             <a:ext cx="1481328" cy="256032"/>
           </a:xfrm>
           <a:prstGeom prst="rect">
@@ -14342,7 +14384,7 @@
         </p:nvSpPr>
         <p:spPr>
           <a:xfrm>
-            <a:off x="7424928" y="3246120"/>
+            <a:off x="7499431" y="3408672"/>
             <a:ext cx="914400" cy="36576"/>
           </a:xfrm>
           <a:prstGeom prst="rect">
@@ -14374,7 +14416,7 @@
         </p:nvSpPr>
         <p:spPr>
           <a:xfrm>
-            <a:off x="7141464" y="3355848"/>
+            <a:off x="7215967" y="3518400"/>
             <a:ext cx="1481328" cy="301752"/>
           </a:xfrm>
           <a:prstGeom prst="rect">
@@ -14413,7 +14455,7 @@
         </p:nvSpPr>
         <p:spPr>
           <a:xfrm>
-            <a:off x="7141464" y="3703320"/>
+            <a:off x="7215967" y="3865872"/>
             <a:ext cx="1481328" cy="822960"/>
           </a:xfrm>
           <a:prstGeom prst="rect">
@@ -14434,9 +14476,6 @@
             </a:pPr>
             <a:r>
               <a:rPr lang="en-US" sz="950" dirty="0">
-                <a:solidFill>
-                  <a:srgbClr val="2D2D2D"/>
-                </a:solidFill>
                 <a:latin typeface="Calibri" pitchFamily="34" charset="0"/>
                 <a:ea typeface="Calibri" pitchFamily="34" charset="-122"/>
                 <a:cs typeface="Calibri" pitchFamily="34" charset="-120"/>
@@ -14454,9 +14493,6 @@
             </a:pPr>
             <a:r>
               <a:rPr lang="en-US" sz="950" dirty="0">
-                <a:solidFill>
-                  <a:srgbClr val="2D2D2D"/>
-                </a:solidFill>
                 <a:latin typeface="Calibri" pitchFamily="34" charset="0"/>
                 <a:ea typeface="Calibri" pitchFamily="34" charset="-122"/>
                 <a:cs typeface="Calibri" pitchFamily="34" charset="-120"/>
@@ -14632,12 +14668,24 @@
         </p:blipFill>
         <p:spPr>
           <a:xfrm>
-            <a:off x="5736885" y="11220"/>
-            <a:ext cx="2937173" cy="1815887"/>
-          </a:xfrm>
-          <a:prstGeom prst="rect">
-            <a:avLst/>
-          </a:prstGeom>
+            <a:off x="5705856" y="33020"/>
+            <a:ext cx="3101294" cy="1917354"/>
+          </a:xfrm>
+          <a:prstGeom prst="rect">
+            <a:avLst/>
+          </a:prstGeom>
+          <a:ln>
+            <a:solidFill>
+              <a:schemeClr val="tx1"/>
+            </a:solidFill>
+          </a:ln>
+          <a:effectLst>
+            <a:outerShdw blurRad="50800" dist="38100" dir="2700000" algn="tl" rotWithShape="0">
+              <a:prstClr val="black">
+                <a:alpha val="40000"/>
+              </a:prstClr>
+            </a:outerShdw>
+          </a:effectLst>
         </p:spPr>
       </p:pic>
     </p:spTree>
